--- a/glide-pptx/tests/decks/06-drawn.pptx
+++ b/glide-pptx/tests/decks/06-drawn.pptx
@@ -298,7 +298,7 @@
               <a:buNone/>
             </a:pPr>
             <a:r>
-              <a:rPr lang="en-US" sz="2400" dirty="0">
+              <a:rPr lang="en-US" sz="2400" cap="all" dirty="0">
                 <a:solidFill>
                   <a:srgbClr val="000000"/>
                 </a:solidFill>
@@ -412,7 +412,88 @@
       </p:sp>
       <p:sp>
         <p:nvSpPr>
-          <p:cNvPr id="7" name="Spacing" descr="glide-pptx:Spacing"/>
+          <p:cNvPr id="7" name="Bubble" descr="glide-pptx:Bubble"/>
+          <p:cNvSpPr/>
+          <p:nvPr/>
+        </p:nvSpPr>
+        <p:spPr>
+          <a:xfrm>
+            <a:off x="381000" y="5842000"/>
+            <a:ext cx="3302000" cy="762000"/>
+          </a:xfrm>
+          <a:custGeom>
+            <a:avLst/>
+            <a:gdLst/>
+            <a:ahLst/>
+            <a:cxnLst/>
+            <a:rect l="0" t="0" r="r" b="b"/>
+            <a:pathLst>
+              <a:path w="3302000" h="762000">
+                <a:moveTo>
+                  <a:pt x="0" y="0"/>
+                </a:moveTo>
+                <a:lnTo>
+                  <a:pt x="3302000" y="0"/>
+                </a:lnTo>
+                <a:lnTo>
+                  <a:pt x="3302000" y="599722"/>
+                </a:lnTo>
+                <a:lnTo>
+                  <a:pt x="917222" y="599722"/>
+                </a:lnTo>
+                <a:lnTo>
+                  <a:pt x="458611" y="762000"/>
+                </a:lnTo>
+                <a:lnTo>
+                  <a:pt x="305741" y="599722"/>
+                </a:lnTo>
+                <a:lnTo>
+                  <a:pt x="0" y="599722"/>
+                </a:lnTo>
+              </a:path>
+            </a:pathLst>
+          </a:custGeom>
+          <a:solidFill>
+            <a:srgbClr val="FFE599"/>
+          </a:solidFill>
+          <a:ln>
+            <a:noFill/>
+          </a:ln>
+        </p:spPr>
+        <p:txBody>
+          <a:bodyPr wrap="square" lIns="91440" tIns="45720" rIns="91440" bIns="45720" anchor="t" anchorCtr="0">
+            <a:noAutofit/>
+          </a:bodyPr>
+          <a:lstStyle/>
+          <a:p>
+            <a:pPr algn="l" lvl="0" marL="0" indent="0">
+              <a:lnSpc>
+                <a:spcPct val="100000"/>
+              </a:lnSpc>
+              <a:spcBef>
+                <a:spcPts val="0"/>
+              </a:spcBef>
+              <a:spcAft>
+                <a:spcPts val="0"/>
+              </a:spcAft>
+              <a:buNone/>
+            </a:pPr>
+            <a:r>
+              <a:rPr lang="en-US" sz="2000" dirty="0">
+                <a:solidFill>
+                  <a:srgbClr val="000000"/>
+                </a:solidFill>
+                <a:latin typeface="DejaVu Sans"/>
+                <a:cs typeface="DejaVu Sans"/>
+              </a:rPr>
+              <a:t>in a bubble</a:t>
+            </a:r>
+          </a:p>
+        </p:txBody>
+      </p:sp>
+      <p:sp>
+        <p:nvSpPr>
+          <p:cNvPr id="8" name="Spacing" descr="glide-pptx:Spacing"/>
           <p:cNvSpPr/>
           <p:nvPr/>
         </p:nvSpPr>
